--- a/all-letters-shaddah/01-alif.pptx
+++ b/all-letters-shaddah/01-alif.pptx
@@ -4,6 +4,9 @@
   <p:sldMasterIdLst>
     <p:sldMasterId id="2147483648" r:id="rId1"/>
   </p:sldMasterIdLst>
+  <p:notesMasterIdLst>
+    <p:notesMasterId r:id="rId26"/>
+  </p:notesMasterIdLst>
   <p:sldIdLst>
     <p:sldId id="256" r:id="rId2"/>
     <p:sldId id="257" r:id="rId3"/>
@@ -30,9 +33,6 @@
     <p:sldId id="278" r:id="rId24"/>
     <p:sldId id="279" r:id="rId25"/>
   </p:sldIdLst>
-  <p:notesMasterIdLst>
-    <p:notesMasterId r:id="rId26"/>
-  </p:notesMasterIdLst>
   <p:sldSz cx="9144000" cy="5143500"/>
   <p:notesSz cx="5143500" cy="9144000"/>
   <p:defaultTextStyle>
